--- a/TrendAmerica_Mailer.pptx
+++ b/TrendAmerica_Mailer.pptx
@@ -3221,11 +3221,11 @@
         <p:spPr>
           <a:xfrm>
             <a:off x="502920" y="1143000"/>
-            <a:ext cx="6766560" cy="1143000"/>
+            <a:ext cx="6766560" cy="1234440"/>
           </a:xfrm>
           <a:prstGeom prst="roundRect">
             <a:avLst>
-              <a:gd name="adj" fmla="val 8000"/>
+              <a:gd name="adj" fmla="val 7000"/>
             </a:avLst>
           </a:prstGeom>
           <a:solidFill>
@@ -3266,7 +3266,7 @@
         </p:nvSpPr>
         <p:spPr>
           <a:xfrm>
-            <a:off x="685800" y="1243584"/>
+            <a:off x="685800" y="1234440"/>
             <a:ext cx="6400800" cy="228600"/>
           </a:xfrm>
           <a:prstGeom prst="rect">
@@ -3301,8 +3301,8 @@
         </p:nvSpPr>
         <p:spPr>
           <a:xfrm>
-            <a:off x="685800" y="1444752"/>
-            <a:ext cx="6400800" cy="502920"/>
+            <a:off x="685800" y="1435608"/>
+            <a:ext cx="6400800" cy="457200"/>
           </a:xfrm>
           <a:prstGeom prst="rect">
             <a:avLst/>
@@ -3317,13 +3317,13 @@
           <a:p>
             <a:pPr algn="ctr"/>
             <a:r>
-              <a:rPr sz="2700" b="1">
+              <a:rPr sz="2800" b="1">
                 <a:solidFill>
                   <a:srgbClr val="0D2847"/>
                 </a:solidFill>
                 <a:latin typeface="Arial"/>
               </a:rPr>
-              <a:t>20% Annualized Preferred Return</a:t>
+              <a:t>20% Preferred Return</a:t>
             </a:r>
           </a:p>
         </p:txBody>
@@ -3336,8 +3336,8 @@
         </p:nvSpPr>
         <p:spPr>
           <a:xfrm>
-            <a:off x="685800" y="1938528"/>
-            <a:ext cx="6400800" cy="256032"/>
+            <a:off x="777240" y="1920240"/>
+            <a:ext cx="6217920" cy="384048"/>
           </a:xfrm>
           <a:prstGeom prst="rect">
             <a:avLst/>
@@ -3350,15 +3350,19 @@
           </a:bodyPr>
           <a:lstStyle/>
           <a:p>
-            <a:pPr algn="ctr"/>
-            <a:r>
-              <a:rPr sz="1200" b="0">
+            <a:pPr algn="ctr">
+              <a:lnSpc>
+                <a:spcPct val="110000"/>
+              </a:lnSpc>
+            </a:pPr>
+            <a:r>
+              <a:rPr sz="1050" b="0">
                 <a:solidFill>
                   <a:srgbClr val="0D2847"/>
                 </a:solidFill>
                 <a:latin typeface="Arial"/>
               </a:rPr>
-              <a:t>California Residential Real Estate Development Projects</a:t>
+              <a:t>Target a 20% annualized preferred return, with uncapped upside above it through a performance-based profit structure. A target, not a guarantee.</a:t>
             </a:r>
           </a:p>
         </p:txBody>
@@ -3371,7 +3375,7 @@
         </p:nvSpPr>
         <p:spPr>
           <a:xfrm>
-            <a:off x="502920" y="2487168"/>
+            <a:off x="502920" y="2578608"/>
             <a:ext cx="6766560" cy="256032"/>
           </a:xfrm>
           <a:prstGeom prst="rect">
@@ -3406,7 +3410,7 @@
         </p:nvSpPr>
         <p:spPr>
           <a:xfrm>
-            <a:off x="502920" y="2743200"/>
+            <a:off x="502920" y="2834640"/>
             <a:ext cx="6766560" cy="11430"/>
           </a:xfrm>
           <a:prstGeom prst="rect">
@@ -3450,8 +3454,8 @@
         </p:nvSpPr>
         <p:spPr>
           <a:xfrm>
-            <a:off x="731520" y="2834640"/>
-            <a:ext cx="6309360" cy="566928"/>
+            <a:off x="731520" y="2926080"/>
+            <a:ext cx="6309360" cy="548640"/>
           </a:xfrm>
           <a:prstGeom prst="rect">
             <a:avLst/>
@@ -3507,7 +3511,7 @@
         </p:nvSpPr>
         <p:spPr>
           <a:xfrm>
-            <a:off x="502920" y="3474720"/>
+            <a:off x="502920" y="3547872"/>
             <a:ext cx="6766560" cy="237744"/>
           </a:xfrm>
           <a:prstGeom prst="rect">
@@ -3542,7 +3546,7 @@
         </p:nvSpPr>
         <p:spPr>
           <a:xfrm>
-            <a:off x="502920" y="3767328"/>
+            <a:off x="502920" y="3822191"/>
             <a:ext cx="1627632" cy="1298448"/>
           </a:xfrm>
           <a:prstGeom prst="roundRect">
@@ -3588,7 +3592,7 @@
         </p:nvSpPr>
         <p:spPr>
           <a:xfrm>
-            <a:off x="1161288" y="3858768"/>
+            <a:off x="1161288" y="3913631"/>
             <a:ext cx="310896" cy="310896"/>
           </a:xfrm>
           <a:prstGeom prst="ellipse">
@@ -3641,7 +3645,7 @@
         </p:nvSpPr>
         <p:spPr>
           <a:xfrm>
-            <a:off x="557784" y="4242816"/>
+            <a:off x="557784" y="4297679"/>
             <a:ext cx="1517904" cy="219456"/>
           </a:xfrm>
           <a:prstGeom prst="rect">
@@ -3676,7 +3680,7 @@
         </p:nvSpPr>
         <p:spPr>
           <a:xfrm>
-            <a:off x="612648" y="4498848"/>
+            <a:off x="612648" y="4553711"/>
             <a:ext cx="1408176" cy="548640"/>
           </a:xfrm>
           <a:prstGeom prst="rect">
@@ -3715,7 +3719,7 @@
         </p:nvSpPr>
         <p:spPr>
           <a:xfrm>
-            <a:off x="2135124" y="4375404"/>
+            <a:off x="2135124" y="4430267"/>
             <a:ext cx="82296" cy="82296"/>
           </a:xfrm>
           <a:prstGeom prst="rect">
@@ -3759,7 +3763,7 @@
         </p:nvSpPr>
         <p:spPr>
           <a:xfrm>
-            <a:off x="2221992" y="3767328"/>
+            <a:off x="2221992" y="3822191"/>
             <a:ext cx="1627632" cy="1298448"/>
           </a:xfrm>
           <a:prstGeom prst="roundRect">
@@ -3805,7 +3809,7 @@
         </p:nvSpPr>
         <p:spPr>
           <a:xfrm>
-            <a:off x="2880360" y="3858768"/>
+            <a:off x="2880360" y="3913631"/>
             <a:ext cx="310896" cy="310896"/>
           </a:xfrm>
           <a:prstGeom prst="ellipse">
@@ -3858,7 +3862,7 @@
         </p:nvSpPr>
         <p:spPr>
           <a:xfrm>
-            <a:off x="2276856" y="4242816"/>
+            <a:off x="2276856" y="4297679"/>
             <a:ext cx="1517904" cy="219456"/>
           </a:xfrm>
           <a:prstGeom prst="rect">
@@ -3893,7 +3897,7 @@
         </p:nvSpPr>
         <p:spPr>
           <a:xfrm>
-            <a:off x="2331720" y="4498848"/>
+            <a:off x="2331720" y="4553711"/>
             <a:ext cx="1408176" cy="548640"/>
           </a:xfrm>
           <a:prstGeom prst="rect">
@@ -3932,7 +3936,7 @@
         </p:nvSpPr>
         <p:spPr>
           <a:xfrm>
-            <a:off x="3854196" y="4375404"/>
+            <a:off x="3854196" y="4430267"/>
             <a:ext cx="82296" cy="82296"/>
           </a:xfrm>
           <a:prstGeom prst="rect">
@@ -3976,7 +3980,7 @@
         </p:nvSpPr>
         <p:spPr>
           <a:xfrm>
-            <a:off x="3941064" y="3767328"/>
+            <a:off x="3941064" y="3822191"/>
             <a:ext cx="1627632" cy="1298448"/>
           </a:xfrm>
           <a:prstGeom prst="roundRect">
@@ -4022,7 +4026,7 @@
         </p:nvSpPr>
         <p:spPr>
           <a:xfrm>
-            <a:off x="4599432" y="3858768"/>
+            <a:off x="4599432" y="3913631"/>
             <a:ext cx="310896" cy="310896"/>
           </a:xfrm>
           <a:prstGeom prst="ellipse">
@@ -4075,7 +4079,7 @@
         </p:nvSpPr>
         <p:spPr>
           <a:xfrm>
-            <a:off x="3995928" y="4242816"/>
+            <a:off x="3995928" y="4297679"/>
             <a:ext cx="1517904" cy="219456"/>
           </a:xfrm>
           <a:prstGeom prst="rect">
@@ -4110,7 +4114,7 @@
         </p:nvSpPr>
         <p:spPr>
           <a:xfrm>
-            <a:off x="4050792" y="4498848"/>
+            <a:off x="4050792" y="4553711"/>
             <a:ext cx="1408176" cy="548640"/>
           </a:xfrm>
           <a:prstGeom prst="rect">
@@ -4149,7 +4153,7 @@
         </p:nvSpPr>
         <p:spPr>
           <a:xfrm>
-            <a:off x="5573268" y="4375404"/>
+            <a:off x="5573268" y="4430267"/>
             <a:ext cx="82296" cy="82296"/>
           </a:xfrm>
           <a:prstGeom prst="rect">
@@ -4193,7 +4197,7 @@
         </p:nvSpPr>
         <p:spPr>
           <a:xfrm>
-            <a:off x="5660136" y="3767328"/>
+            <a:off x="5660136" y="3822191"/>
             <a:ext cx="1627632" cy="1298448"/>
           </a:xfrm>
           <a:prstGeom prst="roundRect">
@@ -4239,7 +4243,7 @@
         </p:nvSpPr>
         <p:spPr>
           <a:xfrm>
-            <a:off x="6318504" y="3858768"/>
+            <a:off x="6318504" y="3913631"/>
             <a:ext cx="310896" cy="310896"/>
           </a:xfrm>
           <a:prstGeom prst="ellipse">
@@ -4292,7 +4296,7 @@
         </p:nvSpPr>
         <p:spPr>
           <a:xfrm>
-            <a:off x="5715000" y="4242816"/>
+            <a:off x="5715000" y="4297679"/>
             <a:ext cx="1517904" cy="219456"/>
           </a:xfrm>
           <a:prstGeom prst="rect">
@@ -4314,7 +4318,7 @@
                 </a:solidFill>
                 <a:latin typeface="Arial"/>
               </a:rPr>
-              <a:t>PROFIT</a:t>
+              <a:t>DISTRIBUTE</a:t>
             </a:r>
           </a:p>
         </p:txBody>
@@ -4327,7 +4331,7 @@
         </p:nvSpPr>
         <p:spPr>
           <a:xfrm>
-            <a:off x="5769864" y="4498848"/>
+            <a:off x="5769864" y="4553711"/>
             <a:ext cx="1408176" cy="548640"/>
           </a:xfrm>
           <a:prstGeom prst="rect">
@@ -4353,7 +4357,7 @@
                 </a:solidFill>
                 <a:latin typeface="Arial"/>
               </a:rPr>
-              <a:t>Distribute returns at 20% annualized preferred rate</a:t>
+              <a:t>Return capital and profits to investors under the project structure</a:t>
             </a:r>
           </a:p>
         </p:txBody>
@@ -4366,8 +4370,8 @@
         </p:nvSpPr>
         <p:spPr>
           <a:xfrm>
-            <a:off x="0" y="5303520"/>
-            <a:ext cx="7772400" cy="749808"/>
+            <a:off x="0" y="5358384"/>
+            <a:ext cx="7772400" cy="713232"/>
           </a:xfrm>
           <a:prstGeom prst="rect">
             <a:avLst/>
@@ -4410,8 +4414,8 @@
         </p:nvSpPr>
         <p:spPr>
           <a:xfrm>
-            <a:off x="0" y="5376672"/>
-            <a:ext cx="1554480" cy="310896"/>
+            <a:off x="0" y="5431536"/>
+            <a:ext cx="1943100" cy="310896"/>
           </a:xfrm>
           <a:prstGeom prst="rect">
             <a:avLst/>
@@ -4426,7 +4430,7 @@
           <a:p>
             <a:pPr algn="ctr"/>
             <a:r>
-              <a:rPr sz="1700" b="1">
+              <a:rPr sz="1800" b="1">
                 <a:solidFill>
                   <a:srgbClr val="0D2847"/>
                 </a:solidFill>
@@ -4445,8 +4449,8 @@
         </p:nvSpPr>
         <p:spPr>
           <a:xfrm>
-            <a:off x="0" y="5687568"/>
-            <a:ext cx="1554480" cy="329184"/>
+            <a:off x="0" y="5760720"/>
+            <a:ext cx="1943100" cy="292608"/>
           </a:xfrm>
           <a:prstGeom prst="rect">
             <a:avLst/>
@@ -4465,7 +4469,7 @@
               </a:lnSpc>
             </a:pPr>
             <a:r>
-              <a:rPr sz="720" b="1">
+              <a:rPr sz="760" b="1">
                 <a:solidFill>
                   <a:srgbClr val="0D2847"/>
                 </a:solidFill>
@@ -4481,7 +4485,7 @@
               </a:lnSpc>
             </a:pPr>
             <a:r>
-              <a:rPr sz="720" b="1">
+              <a:rPr sz="760" b="1">
                 <a:solidFill>
                   <a:srgbClr val="0D2847"/>
                 </a:solidFill>
@@ -4500,8 +4504,8 @@
         </p:nvSpPr>
         <p:spPr>
           <a:xfrm>
-            <a:off x="1554480" y="5376672"/>
-            <a:ext cx="1554480" cy="310896"/>
+            <a:off x="1943100" y="5431536"/>
+            <a:ext cx="1943100" cy="310896"/>
           </a:xfrm>
           <a:prstGeom prst="rect">
             <a:avLst/>
@@ -4516,13 +4520,13 @@
           <a:p>
             <a:pPr algn="ctr"/>
             <a:r>
-              <a:rPr sz="1700" b="1">
+              <a:rPr sz="1800" b="1">
                 <a:solidFill>
                   <a:srgbClr val="0D2847"/>
                 </a:solidFill>
                 <a:latin typeface="Arial"/>
               </a:rPr>
-              <a:t>$500M+</a:t>
+              <a:t>20+</a:t>
             </a:r>
           </a:p>
         </p:txBody>
@@ -4535,8 +4539,8 @@
         </p:nvSpPr>
         <p:spPr>
           <a:xfrm>
-            <a:off x="1554480" y="5687568"/>
-            <a:ext cx="1554480" cy="329184"/>
+            <a:off x="1943100" y="5760720"/>
+            <a:ext cx="1943100" cy="292608"/>
           </a:xfrm>
           <a:prstGeom prst="rect">
             <a:avLst/>
@@ -4555,13 +4559,13 @@
               </a:lnSpc>
             </a:pPr>
             <a:r>
-              <a:rPr sz="720" b="1">
+              <a:rPr sz="760" b="1">
                 <a:solidFill>
                   <a:srgbClr val="0D2847"/>
                 </a:solidFill>
                 <a:latin typeface="Arial"/>
               </a:rPr>
-              <a:t>Land Transactions</a:t>
+              <a:t>Subdivisions</a:t>
             </a:r>
           </a:p>
         </p:txBody>
@@ -4574,8 +4578,8 @@
         </p:nvSpPr>
         <p:spPr>
           <a:xfrm>
-            <a:off x="3108960" y="5376672"/>
-            <a:ext cx="1554480" cy="310896"/>
+            <a:off x="3886200" y="5431536"/>
+            <a:ext cx="1943100" cy="310896"/>
           </a:xfrm>
           <a:prstGeom prst="rect">
             <a:avLst/>
@@ -4590,13 +4594,13 @@
           <a:p>
             <a:pPr algn="ctr"/>
             <a:r>
-              <a:rPr sz="1700" b="1">
+              <a:rPr sz="1800" b="1">
                 <a:solidFill>
                   <a:srgbClr val="0D2847"/>
                 </a:solidFill>
                 <a:latin typeface="Arial"/>
               </a:rPr>
-              <a:t>20+</a:t>
+              <a:t>2,550+</a:t>
             </a:r>
           </a:p>
         </p:txBody>
@@ -4609,8 +4613,8 @@
         </p:nvSpPr>
         <p:spPr>
           <a:xfrm>
-            <a:off x="3108960" y="5687568"/>
-            <a:ext cx="1554480" cy="329184"/>
+            <a:off x="3886200" y="5760720"/>
+            <a:ext cx="1943100" cy="292608"/>
           </a:xfrm>
           <a:prstGeom prst="rect">
             <a:avLst/>
@@ -4629,15 +4633,73 @@
               </a:lnSpc>
             </a:pPr>
             <a:r>
-              <a:rPr sz="720" b="1">
+              <a:rPr sz="760" b="1">
                 <a:solidFill>
                   <a:srgbClr val="0D2847"/>
                 </a:solidFill>
                 <a:latin typeface="Arial"/>
               </a:rPr>
-              <a:t>Subdivision</a:t>
-            </a:r>
-          </a:p>
+              <a:t>Lots Entitled</a:t>
+            </a:r>
+          </a:p>
+        </p:txBody>
+      </p:sp>
+      <p:sp>
+        <p:nvSpPr>
+          <p:cNvPr id="39" name="TextBox 38"/>
+          <p:cNvSpPr txBox="1"/>
+          <p:nvPr/>
+        </p:nvSpPr>
+        <p:spPr>
+          <a:xfrm>
+            <a:off x="5829300" y="5431536"/>
+            <a:ext cx="1943100" cy="310896"/>
+          </a:xfrm>
+          <a:prstGeom prst="rect">
+            <a:avLst/>
+          </a:prstGeom>
+          <a:noFill/>
+        </p:spPr>
+        <p:txBody>
+          <a:bodyPr wrap="square" anchor="t" lIns="0" rIns="0" tIns="0" bIns="0">
+            <a:spAutoFit/>
+          </a:bodyPr>
+          <a:lstStyle/>
+          <a:p>
+            <a:pPr algn="ctr"/>
+            <a:r>
+              <a:rPr sz="1800" b="1">
+                <a:solidFill>
+                  <a:srgbClr val="0D2847"/>
+                </a:solidFill>
+                <a:latin typeface="Arial"/>
+              </a:rPr>
+              <a:t>$1.3B+</a:t>
+            </a:r>
+          </a:p>
+        </p:txBody>
+      </p:sp>
+      <p:sp>
+        <p:nvSpPr>
+          <p:cNvPr id="40" name="TextBox 39"/>
+          <p:cNvSpPr txBox="1"/>
+          <p:nvPr/>
+        </p:nvSpPr>
+        <p:spPr>
+          <a:xfrm>
+            <a:off x="5829300" y="5760720"/>
+            <a:ext cx="1943100" cy="292608"/>
+          </a:xfrm>
+          <a:prstGeom prst="rect">
+            <a:avLst/>
+          </a:prstGeom>
+          <a:noFill/>
+        </p:spPr>
+        <p:txBody>
+          <a:bodyPr wrap="square" anchor="t" lIns="0" rIns="0" tIns="0" bIns="0">
+            <a:spAutoFit/>
+          </a:bodyPr>
+          <a:lstStyle/>
           <a:p>
             <a:pPr algn="ctr">
               <a:lnSpc>
@@ -4645,27 +4707,27 @@
               </a:lnSpc>
             </a:pPr>
             <a:r>
-              <a:rPr sz="720" b="1">
+              <a:rPr sz="760" b="1">
                 <a:solidFill>
                   <a:srgbClr val="0D2847"/>
                 </a:solidFill>
                 <a:latin typeface="Arial"/>
               </a:rPr>
-              <a:t>Projects</a:t>
-            </a:r>
-          </a:p>
-        </p:txBody>
-      </p:sp>
-      <p:sp>
-        <p:nvSpPr>
-          <p:cNvPr id="39" name="TextBox 38"/>
+              <a:t>Transaction Volume</a:t>
+            </a:r>
+          </a:p>
+        </p:txBody>
+      </p:sp>
+      <p:sp>
+        <p:nvSpPr>
+          <p:cNvPr id="41" name="TextBox 40"/>
           <p:cNvSpPr txBox="1"/>
           <p:nvPr/>
         </p:nvSpPr>
         <p:spPr>
           <a:xfrm>
-            <a:off x="4663440" y="5376672"/>
-            <a:ext cx="1554480" cy="310896"/>
+            <a:off x="502920" y="6117336"/>
+            <a:ext cx="6766560" cy="182880"/>
           </a:xfrm>
           <a:prstGeom prst="rect">
             <a:avLst/>
@@ -4680,27 +4742,27 @@
           <a:p>
             <a:pPr algn="ctr"/>
             <a:r>
-              <a:rPr sz="1700" b="1">
-                <a:solidFill>
-                  <a:srgbClr val="0D2847"/>
-                </a:solidFill>
-                <a:latin typeface="Arial"/>
-              </a:rPr>
-              <a:t>2,550+</a:t>
-            </a:r>
-          </a:p>
-        </p:txBody>
-      </p:sp>
-      <p:sp>
-        <p:nvSpPr>
-          <p:cNvPr id="40" name="TextBox 39"/>
+              <a:rPr sz="700" b="0">
+                <a:solidFill>
+                  <a:srgbClr val="A9B4C6"/>
+                </a:solidFill>
+                <a:latin typeface="Arial"/>
+              </a:rPr>
+              <a:t>Figures reflect the prior experience of TrendAmerica's principals at other companies. Past performance does not indicate future results.</a:t>
+            </a:r>
+          </a:p>
+        </p:txBody>
+      </p:sp>
+      <p:sp>
+        <p:nvSpPr>
+          <p:cNvPr id="42" name="TextBox 41"/>
           <p:cNvSpPr txBox="1"/>
           <p:nvPr/>
         </p:nvSpPr>
         <p:spPr>
           <a:xfrm>
-            <a:off x="4663440" y="5687568"/>
-            <a:ext cx="1554480" cy="329184"/>
+            <a:off x="502920" y="6364224"/>
+            <a:ext cx="6766560" cy="256032"/>
           </a:xfrm>
           <a:prstGeom prst="rect">
             <a:avLst/>
@@ -4713,137 +4775,8 @@
           </a:bodyPr>
           <a:lstStyle/>
           <a:p>
-            <a:pPr algn="ctr">
-              <a:lnSpc>
-                <a:spcPct val="100000"/>
-              </a:lnSpc>
-            </a:pPr>
-            <a:r>
-              <a:rPr sz="720" b="1">
-                <a:solidFill>
-                  <a:srgbClr val="0D2847"/>
-                </a:solidFill>
-                <a:latin typeface="Arial"/>
-              </a:rPr>
-              <a:t>Lots in Portfolio</a:t>
-            </a:r>
-          </a:p>
-        </p:txBody>
-      </p:sp>
-      <p:sp>
-        <p:nvSpPr>
-          <p:cNvPr id="41" name="TextBox 40"/>
-          <p:cNvSpPr txBox="1"/>
-          <p:nvPr/>
-        </p:nvSpPr>
-        <p:spPr>
-          <a:xfrm>
-            <a:off x="6217920" y="5376672"/>
-            <a:ext cx="1554480" cy="310896"/>
-          </a:xfrm>
-          <a:prstGeom prst="rect">
-            <a:avLst/>
-          </a:prstGeom>
-          <a:noFill/>
-        </p:spPr>
-        <p:txBody>
-          <a:bodyPr wrap="square" anchor="t" lIns="0" rIns="0" tIns="0" bIns="0">
-            <a:spAutoFit/>
-          </a:bodyPr>
-          <a:lstStyle/>
-          <a:p>
             <a:pPr algn="ctr"/>
             <a:r>
-              <a:rPr sz="1700" b="1">
-                <a:solidFill>
-                  <a:srgbClr val="0D2847"/>
-                </a:solidFill>
-                <a:latin typeface="Arial"/>
-              </a:rPr>
-              <a:t>100%</a:t>
-            </a:r>
-          </a:p>
-        </p:txBody>
-      </p:sp>
-      <p:sp>
-        <p:nvSpPr>
-          <p:cNvPr id="42" name="TextBox 41"/>
-          <p:cNvSpPr txBox="1"/>
-          <p:nvPr/>
-        </p:nvSpPr>
-        <p:spPr>
-          <a:xfrm>
-            <a:off x="6217920" y="5687568"/>
-            <a:ext cx="1554480" cy="329184"/>
-          </a:xfrm>
-          <a:prstGeom prst="rect">
-            <a:avLst/>
-          </a:prstGeom>
-          <a:noFill/>
-        </p:spPr>
-        <p:txBody>
-          <a:bodyPr wrap="square" anchor="t" lIns="0" rIns="0" tIns="0" bIns="0">
-            <a:spAutoFit/>
-          </a:bodyPr>
-          <a:lstStyle/>
-          <a:p>
-            <a:pPr algn="ctr">
-              <a:lnSpc>
-                <a:spcPct val="100000"/>
-              </a:lnSpc>
-            </a:pPr>
-            <a:r>
-              <a:rPr sz="720" b="1">
-                <a:solidFill>
-                  <a:srgbClr val="0D2847"/>
-                </a:solidFill>
-                <a:latin typeface="Arial"/>
-              </a:rPr>
-              <a:t>Project Approval</a:t>
-            </a:r>
-          </a:p>
-          <a:p>
-            <a:pPr algn="ctr">
-              <a:lnSpc>
-                <a:spcPct val="100000"/>
-              </a:lnSpc>
-            </a:pPr>
-            <a:r>
-              <a:rPr sz="720" b="1">
-                <a:solidFill>
-                  <a:srgbClr val="0D2847"/>
-                </a:solidFill>
-                <a:latin typeface="Arial"/>
-              </a:rPr>
-              <a:t>Rate</a:t>
-            </a:r>
-          </a:p>
-        </p:txBody>
-      </p:sp>
-      <p:sp>
-        <p:nvSpPr>
-          <p:cNvPr id="43" name="TextBox 42"/>
-          <p:cNvSpPr txBox="1"/>
-          <p:nvPr/>
-        </p:nvSpPr>
-        <p:spPr>
-          <a:xfrm>
-            <a:off x="502920" y="6272784"/>
-            <a:ext cx="6766560" cy="256032"/>
-          </a:xfrm>
-          <a:prstGeom prst="rect">
-            <a:avLst/>
-          </a:prstGeom>
-          <a:noFill/>
-        </p:spPr>
-        <p:txBody>
-          <a:bodyPr wrap="square" anchor="t" lIns="0" rIns="0" tIns="0" bIns="0">
-            <a:spAutoFit/>
-          </a:bodyPr>
-          <a:lstStyle/>
-          <a:p>
-            <a:pPr algn="ctr"/>
-            <a:r>
               <a:rPr sz="1250" b="1">
                 <a:solidFill>
                   <a:srgbClr val="C9A227"/>
@@ -4857,13 +4790,13 @@
       </p:sp>
       <p:sp>
         <p:nvSpPr>
-          <p:cNvPr id="44" name="Rectangle 43"/>
+          <p:cNvPr id="43" name="Rectangle 42"/>
           <p:cNvSpPr/>
           <p:nvPr/>
         </p:nvSpPr>
         <p:spPr>
           <a:xfrm>
-            <a:off x="502920" y="6528816"/>
+            <a:off x="502920" y="6620256"/>
             <a:ext cx="6766560" cy="11430"/>
           </a:xfrm>
           <a:prstGeom prst="rect">
@@ -4901,13 +4834,13 @@
       </p:sp>
       <p:sp>
         <p:nvSpPr>
-          <p:cNvPr id="45" name="TextBox 44"/>
+          <p:cNvPr id="44" name="TextBox 43"/>
           <p:cNvSpPr txBox="1"/>
           <p:nvPr/>
         </p:nvSpPr>
         <p:spPr>
           <a:xfrm>
-            <a:off x="594360" y="6675120"/>
+            <a:off x="594360" y="6766560"/>
             <a:ext cx="3108960" cy="201168"/>
           </a:xfrm>
           <a:prstGeom prst="rect">
@@ -4945,13 +4878,13 @@
       </p:sp>
       <p:sp>
         <p:nvSpPr>
-          <p:cNvPr id="46" name="TextBox 45"/>
+          <p:cNvPr id="45" name="TextBox 44"/>
           <p:cNvSpPr txBox="1"/>
           <p:nvPr/>
         </p:nvSpPr>
         <p:spPr>
           <a:xfrm>
-            <a:off x="594360" y="6894576"/>
+            <a:off x="594360" y="6986016"/>
             <a:ext cx="3108960" cy="676656"/>
           </a:xfrm>
           <a:prstGeom prst="rect">
@@ -4977,20 +4910,20 @@
                 </a:solidFill>
                 <a:latin typeface="Arial"/>
               </a:rPr>
-              <a:t>We create "Paper Lots" — approved subdivision maps — without construction. The homebuilder takes the development risk, not our stakeholders.</a:t>
-            </a:r>
-          </a:p>
-        </p:txBody>
-      </p:sp>
-      <p:sp>
-        <p:nvSpPr>
-          <p:cNvPr id="47" name="TextBox 46"/>
+              <a:t>We create "Paper Lots" — approved subdivision maps — without construction. The homebuilder takes the development risk, not our investors.</a:t>
+            </a:r>
+          </a:p>
+        </p:txBody>
+      </p:sp>
+      <p:sp>
+        <p:nvSpPr>
+          <p:cNvPr id="46" name="TextBox 45"/>
           <p:cNvSpPr txBox="1"/>
           <p:nvPr/>
         </p:nvSpPr>
         <p:spPr>
           <a:xfrm>
-            <a:off x="4069080" y="6675120"/>
+            <a:off x="4069080" y="6766560"/>
             <a:ext cx="3108960" cy="201168"/>
           </a:xfrm>
           <a:prstGeom prst="rect">
@@ -5021,20 +4954,20 @@
                 </a:solidFill>
                 <a:latin typeface="Arial"/>
               </a:rPr>
-              <a:t>Stakeholder Protections Built In</a:t>
-            </a:r>
-          </a:p>
-        </p:txBody>
-      </p:sp>
-      <p:sp>
-        <p:nvSpPr>
-          <p:cNvPr id="48" name="TextBox 47"/>
+              <a:t>Our Upside Is Your Upside</a:t>
+            </a:r>
+          </a:p>
+        </p:txBody>
+      </p:sp>
+      <p:sp>
+        <p:nvSpPr>
+          <p:cNvPr id="47" name="TextBox 46"/>
           <p:cNvSpPr txBox="1"/>
           <p:nvPr/>
         </p:nvSpPr>
         <p:spPr>
           <a:xfrm>
-            <a:off x="4069080" y="6894576"/>
+            <a:off x="4069080" y="6986016"/>
             <a:ext cx="3108960" cy="676656"/>
           </a:xfrm>
           <a:prstGeom prst="rect">
@@ -5060,20 +4993,20 @@
                 </a:solidFill>
                 <a:latin typeface="Arial"/>
               </a:rPr>
-              <a:t>40% stakeholder approval required on all project expenses over $10,000. Full LLC protection and audit rights on every project's bank account.</a:t>
-            </a:r>
-          </a:p>
-        </p:txBody>
-      </p:sp>
-      <p:sp>
-        <p:nvSpPr>
-          <p:cNvPr id="49" name="TextBox 48"/>
+              <a:t>We earn our profit share only after investors receive their preferred return — so we're driven to push every project's return as high as possible. When you win, we win.</a:t>
+            </a:r>
+          </a:p>
+        </p:txBody>
+      </p:sp>
+      <p:sp>
+        <p:nvSpPr>
+          <p:cNvPr id="48" name="TextBox 47"/>
           <p:cNvSpPr txBox="1"/>
           <p:nvPr/>
         </p:nvSpPr>
         <p:spPr>
           <a:xfrm>
-            <a:off x="594360" y="7589520"/>
+            <a:off x="594360" y="7680960"/>
             <a:ext cx="3108960" cy="201168"/>
           </a:xfrm>
           <a:prstGeom prst="rect">
@@ -5111,13 +5044,13 @@
       </p:sp>
       <p:sp>
         <p:nvSpPr>
-          <p:cNvPr id="50" name="TextBox 49"/>
+          <p:cNvPr id="49" name="TextBox 48"/>
           <p:cNvSpPr txBox="1"/>
           <p:nvPr/>
         </p:nvSpPr>
         <p:spPr>
           <a:xfrm>
-            <a:off x="594360" y="7808976"/>
+            <a:off x="594360" y="7900416"/>
             <a:ext cx="3108960" cy="676656"/>
           </a:xfrm>
           <a:prstGeom prst="rect">
@@ -5143,20 +5076,20 @@
                 </a:solidFill>
                 <a:latin typeface="Arial"/>
               </a:rPr>
-              <a:t>Our project financial analysis proforma mirrors theirs exactly, giving us a decisive advantage in negotiating land acquisitions and sales to California's premier builders.</a:t>
-            </a:r>
-          </a:p>
-        </p:txBody>
-      </p:sp>
-      <p:sp>
-        <p:nvSpPr>
-          <p:cNvPr id="51" name="TextBox 50"/>
+              <a:t>Our project financial analysis proforma mirrors theirs, giving us a decisive advantage in negotiating land acquisitions and sales to California's premier builders.</a:t>
+            </a:r>
+          </a:p>
+        </p:txBody>
+      </p:sp>
+      <p:sp>
+        <p:nvSpPr>
+          <p:cNvPr id="50" name="TextBox 49"/>
           <p:cNvSpPr txBox="1"/>
           <p:nvPr/>
         </p:nvSpPr>
         <p:spPr>
           <a:xfrm>
-            <a:off x="4069080" y="7589520"/>
+            <a:off x="4069080" y="7680960"/>
             <a:ext cx="3108960" cy="201168"/>
           </a:xfrm>
           <a:prstGeom prst="rect">
@@ -5194,13 +5127,13 @@
       </p:sp>
       <p:sp>
         <p:nvSpPr>
-          <p:cNvPr id="52" name="TextBox 51"/>
+          <p:cNvPr id="51" name="TextBox 50"/>
           <p:cNvSpPr txBox="1"/>
           <p:nvPr/>
         </p:nvSpPr>
         <p:spPr>
           <a:xfrm>
-            <a:off x="4069080" y="7808976"/>
+            <a:off x="4069080" y="7900416"/>
             <a:ext cx="3108960" cy="676656"/>
           </a:xfrm>
           <a:prstGeom prst="rect">
@@ -5226,20 +5159,20 @@
                 </a:solidFill>
                 <a:latin typeface="Arial"/>
               </a:rPr>
-              <a:t>The most regulated state is the highest-barrier market — which means the fewest competitors and the highest returns for those who master it. We've mastered it the last 25 years.</a:t>
-            </a:r>
-          </a:p>
-        </p:txBody>
-      </p:sp>
-      <p:sp>
-        <p:nvSpPr>
-          <p:cNvPr id="53" name="Rounded Rectangle 52"/>
+              <a:t>The most regulated state is the highest-barrier market — fewer competitors for those who know it. Our principals have worked in California entitlements for decades.</a:t>
+            </a:r>
+          </a:p>
+        </p:txBody>
+      </p:sp>
+      <p:sp>
+        <p:nvSpPr>
+          <p:cNvPr id="52" name="Rounded Rectangle 51"/>
           <p:cNvSpPr/>
           <p:nvPr/>
         </p:nvSpPr>
         <p:spPr>
           <a:xfrm>
-            <a:off x="502920" y="8577072"/>
+            <a:off x="502920" y="8613648"/>
             <a:ext cx="6766560" cy="658368"/>
           </a:xfrm>
           <a:prstGeom prst="roundRect">
@@ -5281,14 +5214,14 @@
       </p:sp>
       <p:sp>
         <p:nvSpPr>
-          <p:cNvPr id="54" name="TextBox 53"/>
+          <p:cNvPr id="53" name="TextBox 52"/>
           <p:cNvSpPr txBox="1"/>
           <p:nvPr/>
         </p:nvSpPr>
         <p:spPr>
           <a:xfrm>
-            <a:off x="685800" y="8686800"/>
-            <a:ext cx="6400800" cy="237744"/>
+            <a:off x="640080" y="8723376"/>
+            <a:ext cx="6492240" cy="237744"/>
           </a:xfrm>
           <a:prstGeom prst="rect">
             <a:avLst/>
@@ -5309,20 +5242,20 @@
                 </a:solidFill>
                 <a:latin typeface="Arial"/>
               </a:rPr>
-              <a:t>Minimum Investment: $20,000 per project  •  Paper Subdivision Lots  •  No Construction Risk</a:t>
-            </a:r>
-          </a:p>
-        </p:txBody>
-      </p:sp>
-      <p:sp>
-        <p:nvSpPr>
-          <p:cNvPr id="55" name="TextBox 54"/>
+              <a:t>Minimum Investment: $20,000 per project  •  Accredited Investors Only  •  Paper Lots</a:t>
+            </a:r>
+          </a:p>
+        </p:txBody>
+      </p:sp>
+      <p:sp>
+        <p:nvSpPr>
+          <p:cNvPr id="54" name="TextBox 53"/>
           <p:cNvSpPr txBox="1"/>
           <p:nvPr/>
         </p:nvSpPr>
         <p:spPr>
           <a:xfrm>
-            <a:off x="685800" y="8942832"/>
+            <a:off x="685800" y="8979408"/>
             <a:ext cx="6400800" cy="201168"/>
           </a:xfrm>
           <a:prstGeom prst="rect">
@@ -5344,14 +5277,14 @@
                 </a:solidFill>
                 <a:latin typeface="Arial"/>
               </a:rPr>
-              <a:t>Each project uses a Single Entity LLC — your funds are isolated, protected, and auditable</a:t>
-            </a:r>
-          </a:p>
-        </p:txBody>
-      </p:sp>
-      <p:sp>
-        <p:nvSpPr>
-          <p:cNvPr id="56" name="TextBox 55"/>
+              <a:t>Each project is held in its own single-purpose LLC.</a:t>
+            </a:r>
+          </a:p>
+        </p:txBody>
+      </p:sp>
+      <p:sp>
+        <p:nvSpPr>
+          <p:cNvPr id="55" name="TextBox 54"/>
           <p:cNvSpPr txBox="1"/>
           <p:nvPr/>
         </p:nvSpPr>
@@ -5386,7 +5319,7 @@
       </p:sp>
       <p:sp>
         <p:nvSpPr>
-          <p:cNvPr id="57" name="Rectangle 56"/>
+          <p:cNvPr id="56" name="Rectangle 55"/>
           <p:cNvSpPr/>
           <p:nvPr/>
         </p:nvSpPr>
@@ -5430,7 +5363,7 @@
       </p:sp>
       <p:sp>
         <p:nvSpPr>
-          <p:cNvPr id="58" name="TextBox 57"/>
+          <p:cNvPr id="57" name="TextBox 56"/>
           <p:cNvSpPr txBox="1"/>
           <p:nvPr/>
         </p:nvSpPr>
@@ -6582,7 +6515,7 @@
                 </a:solidFill>
                 <a:latin typeface="Arial"/>
               </a:rPr>
-              <a:t>Institutional real estate finance professional with nearly a decade at Hayden Properties, Presidium, and Balboa Real Estate Partners. Led projects totaling $800M+ in transaction volume and 18,000+ units managed. Expert in proforma modeling, Return on Investment analysis, and stakeholder reporting.</a:t>
+              <a:t>Institutional real estate finance professional with nearly a decade at Hayden Properties, Presidium, and Balboa Real Estate Partners. Led projects totaling $800M+ in transaction volume and 18,000+ units managed. Expert in proforma modeling, Return on Investment analysis, and investor reporting.</a:t>
             </a:r>
           </a:p>
         </p:txBody>
@@ -6752,14 +6685,14 @@
                 </a:solidFill>
                 <a:latin typeface="Arial"/>
               </a:rPr>
-              <a:t>CURRENT &amp; RECENT PROJECTS — APPROVED SUBDIVISION MAPS</a:t>
+              <a:t>SELECT PROJECTS &amp; SITE PLANS</a:t>
             </a:r>
           </a:p>
         </p:txBody>
       </p:sp>
       <p:pic>
         <p:nvPicPr>
-          <p:cNvPr id="28" name="Picture 27" descr="proj1.jpg"/>
+          <p:cNvPr id="28" name="Picture 27" descr="bougher.jpg"/>
           <p:cNvPicPr>
             <a:picLocks noChangeAspect="1"/>
           </p:cNvPicPr>
@@ -6786,9 +6719,44 @@
           </a:ln>
         </p:spPr>
       </p:pic>
+      <p:sp>
+        <p:nvSpPr>
+          <p:cNvPr id="29" name="TextBox 28"/>
+          <p:cNvSpPr txBox="1"/>
+          <p:nvPr/>
+        </p:nvSpPr>
+        <p:spPr>
+          <a:xfrm>
+            <a:off x="502920" y="7077456"/>
+            <a:ext cx="1627632" cy="182880"/>
+          </a:xfrm>
+          <a:prstGeom prst="rect">
+            <a:avLst/>
+          </a:prstGeom>
+          <a:noFill/>
+        </p:spPr>
+        <p:txBody>
+          <a:bodyPr wrap="square" anchor="t" lIns="0" rIns="0" tIns="0" bIns="0">
+            <a:spAutoFit/>
+          </a:bodyPr>
+          <a:lstStyle/>
+          <a:p>
+            <a:pPr algn="ctr"/>
+            <a:r>
+              <a:rPr sz="750" b="1">
+                <a:solidFill>
+                  <a:srgbClr val="DCE2EC"/>
+                </a:solidFill>
+                <a:latin typeface="Arial"/>
+              </a:rPr>
+              <a:t>Bougher Road — Vista</a:t>
+            </a:r>
+          </a:p>
+        </p:txBody>
+      </p:sp>
       <p:pic>
         <p:nvPicPr>
-          <p:cNvPr id="29" name="Picture 28" descr="proj2.jpg"/>
+          <p:cNvPr id="30" name="Picture 29" descr="aberdeen.jpg"/>
           <p:cNvPicPr>
             <a:picLocks noChangeAspect="1"/>
           </p:cNvPicPr>
@@ -6815,9 +6783,44 @@
           </a:ln>
         </p:spPr>
       </p:pic>
+      <p:sp>
+        <p:nvSpPr>
+          <p:cNvPr id="31" name="TextBox 30"/>
+          <p:cNvSpPr txBox="1"/>
+          <p:nvPr/>
+        </p:nvSpPr>
+        <p:spPr>
+          <a:xfrm>
+            <a:off x="2221992" y="7077456"/>
+            <a:ext cx="1627632" cy="182880"/>
+          </a:xfrm>
+          <a:prstGeom prst="rect">
+            <a:avLst/>
+          </a:prstGeom>
+          <a:noFill/>
+        </p:spPr>
+        <p:txBody>
+          <a:bodyPr wrap="square" anchor="t" lIns="0" rIns="0" tIns="0" bIns="0">
+            <a:spAutoFit/>
+          </a:bodyPr>
+          <a:lstStyle/>
+          <a:p>
+            <a:pPr algn="ctr"/>
+            <a:r>
+              <a:rPr sz="750" b="1">
+                <a:solidFill>
+                  <a:srgbClr val="DCE2EC"/>
+                </a:solidFill>
+                <a:latin typeface="Arial"/>
+              </a:rPr>
+              <a:t>Aberdeen Ave — San Marcos</a:t>
+            </a:r>
+          </a:p>
+        </p:txBody>
+      </p:sp>
       <p:pic>
         <p:nvPicPr>
-          <p:cNvPr id="30" name="Picture 29" descr="proj3.jpg"/>
+          <p:cNvPr id="32" name="Picture 31" descr="noll.jpg"/>
           <p:cNvPicPr>
             <a:picLocks noChangeAspect="1"/>
           </p:cNvPicPr>
@@ -6844,45 +6847,16 @@
           </a:ln>
         </p:spPr>
       </p:pic>
-      <p:pic>
-        <p:nvPicPr>
-          <p:cNvPr id="31" name="Picture 30" descr="proj4.jpg"/>
-          <p:cNvPicPr>
-            <a:picLocks noChangeAspect="1"/>
-          </p:cNvPicPr>
-          <p:nvPr/>
-        </p:nvPicPr>
-        <p:blipFill>
-          <a:blip r:embed="rId8"/>
-          <a:stretch>
-            <a:fillRect/>
-          </a:stretch>
-        </p:blipFill>
-        <p:spPr>
-          <a:xfrm>
-            <a:off x="5660136" y="5650992"/>
-            <a:ext cx="1627632" cy="1389888"/>
-          </a:xfrm>
-          <a:prstGeom prst="rect">
-            <a:avLst/>
-          </a:prstGeom>
-          <a:ln w="9525">
-            <a:solidFill>
-              <a:srgbClr val="4A5A75"/>
-            </a:solidFill>
-          </a:ln>
-        </p:spPr>
-      </p:pic>
-      <p:sp>
-        <p:nvSpPr>
-          <p:cNvPr id="32" name="TextBox 31"/>
+      <p:sp>
+        <p:nvSpPr>
+          <p:cNvPr id="33" name="TextBox 32"/>
           <p:cNvSpPr txBox="1"/>
           <p:nvPr/>
         </p:nvSpPr>
         <p:spPr>
           <a:xfrm>
-            <a:off x="502920" y="7315200"/>
-            <a:ext cx="6766560" cy="914400"/>
+            <a:off x="3941064" y="7077456"/>
+            <a:ext cx="1627632" cy="182880"/>
           </a:xfrm>
           <a:prstGeom prst="rect">
             <a:avLst/>
@@ -6895,26 +6869,164 @@
           </a:bodyPr>
           <a:lstStyle/>
           <a:p>
+            <a:pPr algn="ctr"/>
+            <a:r>
+              <a:rPr sz="750" b="1">
+                <a:solidFill>
+                  <a:srgbClr val="DCE2EC"/>
+                </a:solidFill>
+                <a:latin typeface="Arial"/>
+              </a:rPr>
+              <a:t>Noll Property — Vista</a:t>
+            </a:r>
+          </a:p>
+        </p:txBody>
+      </p:sp>
+      <p:sp>
+        <p:nvSpPr>
+          <p:cNvPr id="34" name="Rounded Rectangle 33"/>
+          <p:cNvSpPr/>
+          <p:nvPr/>
+        </p:nvSpPr>
+        <p:spPr>
+          <a:xfrm>
+            <a:off x="5660136" y="5650992"/>
+            <a:ext cx="1627632" cy="1389888"/>
+          </a:xfrm>
+          <a:prstGeom prst="roundRect">
+            <a:avLst>
+              <a:gd name="adj" fmla="val 4000"/>
+            </a:avLst>
+          </a:prstGeom>
+          <a:solidFill>
+            <a:srgbClr val="1B3A66"/>
+          </a:solidFill>
+          <a:ln w="12700">
+            <a:solidFill>
+              <a:srgbClr val="C9A227"/>
+            </a:solidFill>
+          </a:ln>
+          <a:effectLst/>
+        </p:spPr>
+        <p:style>
+          <a:lnRef idx="1">
+            <a:schemeClr val="accent1"/>
+          </a:lnRef>
+          <a:fillRef idx="3">
+            <a:schemeClr val="accent1"/>
+          </a:fillRef>
+          <a:effectRef idx="2">
+            <a:schemeClr val="accent1"/>
+          </a:effectRef>
+          <a:fontRef idx="minor">
+            <a:schemeClr val="lt1"/>
+          </a:fontRef>
+        </p:style>
+        <p:txBody>
+          <a:bodyPr rtlCol="0" anchor="ctr"/>
+          <a:lstStyle/>
+          <a:p>
+            <a:pPr algn="ctr"/>
+          </a:p>
+        </p:txBody>
+      </p:sp>
+      <p:sp>
+        <p:nvSpPr>
+          <p:cNvPr id="35" name="TextBox 34"/>
+          <p:cNvSpPr txBox="1"/>
+          <p:nvPr/>
+        </p:nvSpPr>
+        <p:spPr>
+          <a:xfrm>
+            <a:off x="5660136" y="6181344"/>
+            <a:ext cx="1627632" cy="365760"/>
+          </a:xfrm>
+          <a:prstGeom prst="rect">
+            <a:avLst/>
+          </a:prstGeom>
+          <a:noFill/>
+        </p:spPr>
+        <p:txBody>
+          <a:bodyPr wrap="square" anchor="t" lIns="0" rIns="0" tIns="0" bIns="0">
+            <a:spAutoFit/>
+          </a:bodyPr>
+          <a:lstStyle/>
+          <a:p>
             <a:pPr algn="ctr">
               <a:lnSpc>
-                <a:spcPct val="120000"/>
+                <a:spcPct val="100000"/>
               </a:lnSpc>
             </a:pPr>
             <a:r>
-              <a:rPr sz="700" b="0">
+              <a:rPr sz="900" b="1">
+                <a:solidFill>
+                  <a:srgbClr val="C9A227"/>
+                </a:solidFill>
+                <a:latin typeface="Arial"/>
+              </a:rPr>
+              <a:t>Add 4th</a:t>
+            </a:r>
+          </a:p>
+          <a:p>
+            <a:pPr algn="ctr">
+              <a:lnSpc>
+                <a:spcPct val="100000"/>
+              </a:lnSpc>
+            </a:pPr>
+            <a:r>
+              <a:rPr sz="900" b="1">
+                <a:solidFill>
+                  <a:srgbClr val="C9A227"/>
+                </a:solidFill>
+                <a:latin typeface="Arial"/>
+              </a:rPr>
+              <a:t>project image</a:t>
+            </a:r>
+          </a:p>
+        </p:txBody>
+      </p:sp>
+      <p:sp>
+        <p:nvSpPr>
+          <p:cNvPr id="36" name="TextBox 35"/>
+          <p:cNvSpPr txBox="1"/>
+          <p:nvPr/>
+        </p:nvSpPr>
+        <p:spPr>
+          <a:xfrm>
+            <a:off x="502920" y="7406640"/>
+            <a:ext cx="6766560" cy="1005840"/>
+          </a:xfrm>
+          <a:prstGeom prst="rect">
+            <a:avLst/>
+          </a:prstGeom>
+          <a:noFill/>
+        </p:spPr>
+        <p:txBody>
+          <a:bodyPr wrap="square" anchor="t" lIns="0" rIns="0" tIns="0" bIns="0">
+            <a:spAutoFit/>
+          </a:bodyPr>
+          <a:lstStyle/>
+          <a:p>
+            <a:pPr algn="ctr">
+              <a:lnSpc>
+                <a:spcPct val="115000"/>
+              </a:lnSpc>
+            </a:pPr>
+            <a:r>
+              <a:rPr sz="660" b="0">
                 <a:solidFill>
                   <a:srgbClr val="A9B4C6"/>
                 </a:solidFill>
                 <a:latin typeface="Arial"/>
               </a:rPr>
-              <a:t>This material is for informational purposes only and does not constitute an offer to sell or a solicitation of an offer to buy any security. Investment in real estate involves risk, including the possible loss of principal. Past performance is not indicative of future results. Returns referenced are targets and not guaranteed. All investments are made through a Single Entity LLC (SELLC); investors are Members of the SELLC with proportionate rights. Prospective investors should conduct their own due diligence and consult with legal, tax, and financial advisors before investing. TrendAmerica LLC is not a registered broker-dealer or investment adviser.</a:t>
-            </a:r>
-          </a:p>
-        </p:txBody>
-      </p:sp>
-      <p:sp>
-        <p:nvSpPr>
-          <p:cNvPr id="33" name="Rectangle 32"/>
+              <a:t>This material is for informational purposes only and is not an offer to sell or a solicitation of an offer to buy any security. Securities are offered only to accredited investors, and only by means of a Private Placement Memorandum and related subscription documents for a specific project. Investments in land entitlement are speculative, illiquid, and involve a high degree of risk, including the possible loss of the entire investment. Any returns described, including the preferred return, are targets and are not guaranteed. Past performance, including the prior experience of TrendAmerica's principals at other companies, does not indicate future results. Forward-looking statements are subject to risks and uncertainties and may not occur. No federal or state securities regulator has approved this offering or these materials. TrendAmerica is not a registered broker-dealer or investment adviser. Prospective investors should consult their own legal, tax, and financial advisors.</a:t>
+            </a:r>
+          </a:p>
+        </p:txBody>
+      </p:sp>
+      <p:sp>
+        <p:nvSpPr>
+          <p:cNvPr id="37" name="Rectangle 36"/>
           <p:cNvSpPr/>
           <p:nvPr/>
         </p:nvSpPr>
@@ -6958,14 +7070,14 @@
       </p:sp>
       <p:sp>
         <p:nvSpPr>
-          <p:cNvPr id="34" name="TextBox 33"/>
+          <p:cNvPr id="38" name="TextBox 37"/>
           <p:cNvSpPr txBox="1"/>
           <p:nvPr/>
         </p:nvSpPr>
         <p:spPr>
           <a:xfrm>
-            <a:off x="0" y="9116568"/>
-            <a:ext cx="7772400" cy="411480"/>
+            <a:off x="0" y="9107424"/>
+            <a:ext cx="7772400" cy="384048"/>
           </a:xfrm>
           <a:prstGeom prst="rect">
             <a:avLst/>
@@ -6980,27 +7092,27 @@
           <a:p>
             <a:pPr algn="ctr"/>
             <a:r>
-              <a:rPr sz="2400" b="1">
+              <a:rPr sz="2200" b="1">
                 <a:solidFill>
                   <a:srgbClr val="0D2847"/>
                 </a:solidFill>
                 <a:latin typeface="Arial"/>
               </a:rPr>
-              <a:t>READY TO INVEST?</a:t>
-            </a:r>
-          </a:p>
-        </p:txBody>
-      </p:sp>
-      <p:sp>
-        <p:nvSpPr>
-          <p:cNvPr id="35" name="TextBox 34"/>
+              <a:t>READY TO LEARN MORE?</a:t>
+            </a:r>
+          </a:p>
+        </p:txBody>
+      </p:sp>
+      <p:sp>
+        <p:nvSpPr>
+          <p:cNvPr id="39" name="TextBox 38"/>
           <p:cNvSpPr txBox="1"/>
           <p:nvPr/>
         </p:nvSpPr>
         <p:spPr>
           <a:xfrm>
-            <a:off x="0" y="9528048"/>
-            <a:ext cx="7772400" cy="329184"/>
+            <a:off x="0" y="9509760"/>
+            <a:ext cx="7772400" cy="274320"/>
           </a:xfrm>
           <a:prstGeom prst="rect">
             <a:avLst/>
@@ -7015,27 +7127,54 @@
           <a:p>
             <a:pPr algn="ctr"/>
             <a:r>
-              <a:rPr sz="1900" b="1">
+              <a:rPr sz="1300" b="0">
                 <a:solidFill>
                   <a:srgbClr val="0D2847"/>
                 </a:solidFill>
                 <a:latin typeface="Arial"/>
               </a:rPr>
-              <a:t>VISIT  www.TrendAmericaLand.com</a:t>
-            </a:r>
-          </a:p>
-        </p:txBody>
-      </p:sp>
-      <p:sp>
-        <p:nvSpPr>
-          <p:cNvPr id="36" name="TextBox 35"/>
+              <a:t>Reach out by phone or email:  </a:t>
+            </a:r>
+            <a:r>
+              <a:rPr sz="1300" b="1">
+                <a:solidFill>
+                  <a:srgbClr val="0D2847"/>
+                </a:solidFill>
+                <a:latin typeface="Arial"/>
+              </a:rPr>
+              <a:t>(619) 329-1350</a:t>
+            </a:r>
+            <a:r>
+              <a:rPr sz="1300" b="0">
+                <a:solidFill>
+                  <a:srgbClr val="0D2847"/>
+                </a:solidFill>
+                <a:latin typeface="Arial"/>
+              </a:rPr>
+              <a:t>   |   </a:t>
+            </a:r>
+            <a:r>
+              <a:rPr sz="1300" b="1">
+                <a:solidFill>
+                  <a:srgbClr val="0D2847"/>
+                </a:solidFill>
+                <a:latin typeface="Arial"/>
+              </a:rPr>
+              <a:t>info@TrendAmericaLand.com</a:t>
+            </a:r>
+          </a:p>
+        </p:txBody>
+      </p:sp>
+      <p:sp>
+        <p:nvSpPr>
+          <p:cNvPr id="40" name="TextBox 39"/>
           <p:cNvSpPr txBox="1"/>
           <p:nvPr/>
         </p:nvSpPr>
         <p:spPr>
           <a:xfrm>
-            <a:off x="0" y="9857232"/>
-            <a:ext cx="7772400" cy="182880"/>
+            <a:off x="0" y="9820656"/>
+            <a:ext cx="7772400" cy="201168"/>
           </a:xfrm>
           <a:prstGeom prst="rect">
             <a:avLst/>
@@ -7056,7 +7195,7 @@
                 </a:solidFill>
                 <a:latin typeface="Arial"/>
               </a:rPr>
-              <a:t>TrendAmericaLand LLC  •  California Residential Land Development  •  info@TrendAmericaLand.com</a:t>
+              <a:t>www.TrendAmericaLand.com  •  California Residential Land Development</a:t>
             </a:r>
           </a:p>
         </p:txBody>
